--- a/plots/adjusted_aclf_nohisp.pptx
+++ b/plots/adjusted_aclf_nohisp.pptx
@@ -2951,528 +2951,528 @@
           </p:nvSpPr>
           <p:spPr>
             <a:xfrm>
-              <a:off x="1019512" y="3854707"/>
-              <a:ext cx="7591371" cy="1210188"/>
+              <a:off x="1019512" y="3511428"/>
+              <a:ext cx="7591371" cy="1553466"/>
             </a:xfrm>
             <a:custGeom>
               <a:avLst/>
               <a:pathLst>
-                <a:path w="7591371" h="1210188">
+                <a:path w="7591371" h="1553466">
                   <a:moveTo>
-                    <a:pt x="0" y="1210188"/>
+                    <a:pt x="0" y="1553466"/>
                   </a:moveTo>
                   <a:lnTo>
-                    <a:pt x="84348" y="1210188"/>
-                  </a:lnTo>
-                  <a:lnTo>
-                    <a:pt x="84348" y="1189303"/>
-                  </a:lnTo>
-                  <a:lnTo>
-                    <a:pt x="168697" y="1189303"/>
-                  </a:lnTo>
-                  <a:lnTo>
-                    <a:pt x="168697" y="1168363"/>
-                  </a:lnTo>
-                  <a:lnTo>
-                    <a:pt x="253045" y="1168363"/>
-                  </a:lnTo>
-                  <a:lnTo>
-                    <a:pt x="253045" y="1147214"/>
-                  </a:lnTo>
-                  <a:lnTo>
-                    <a:pt x="337394" y="1147214"/>
-                  </a:lnTo>
-                  <a:lnTo>
-                    <a:pt x="337394" y="1136514"/>
-                  </a:lnTo>
-                  <a:lnTo>
-                    <a:pt x="421742" y="1136514"/>
-                  </a:lnTo>
-                  <a:lnTo>
-                    <a:pt x="421742" y="1115113"/>
-                  </a:lnTo>
-                  <a:lnTo>
-                    <a:pt x="506091" y="1115113"/>
-                  </a:lnTo>
-                  <a:lnTo>
-                    <a:pt x="506091" y="1093639"/>
-                  </a:lnTo>
-                  <a:lnTo>
-                    <a:pt x="590440" y="1093639"/>
-                  </a:lnTo>
-                  <a:lnTo>
-                    <a:pt x="590440" y="1061412"/>
-                  </a:lnTo>
-                  <a:lnTo>
-                    <a:pt x="674788" y="1061412"/>
-                  </a:lnTo>
-                  <a:lnTo>
-                    <a:pt x="674788" y="1050513"/>
-                  </a:lnTo>
-                  <a:lnTo>
-                    <a:pt x="759137" y="1050513"/>
-                  </a:lnTo>
-                  <a:lnTo>
-                    <a:pt x="759137" y="996385"/>
-                  </a:lnTo>
-                  <a:lnTo>
-                    <a:pt x="843485" y="996385"/>
-                  </a:lnTo>
-                  <a:lnTo>
-                    <a:pt x="843485" y="963447"/>
-                  </a:lnTo>
-                  <a:lnTo>
-                    <a:pt x="927834" y="963447"/>
-                  </a:lnTo>
-                  <a:lnTo>
-                    <a:pt x="927834" y="919181"/>
-                  </a:lnTo>
-                  <a:lnTo>
-                    <a:pt x="1012182" y="919181"/>
-                  </a:lnTo>
-                  <a:lnTo>
-                    <a:pt x="1012182" y="841291"/>
-                  </a:lnTo>
-                  <a:lnTo>
-                    <a:pt x="1096531" y="841291"/>
-                  </a:lnTo>
-                  <a:lnTo>
-                    <a:pt x="1096531" y="806446"/>
-                  </a:lnTo>
-                  <a:lnTo>
-                    <a:pt x="1180880" y="806446"/>
-                  </a:lnTo>
-                  <a:lnTo>
-                    <a:pt x="1180880" y="782815"/>
-                  </a:lnTo>
-                  <a:lnTo>
-                    <a:pt x="1265228" y="782815"/>
-                  </a:lnTo>
-                  <a:lnTo>
-                    <a:pt x="1265228" y="747299"/>
-                  </a:lnTo>
-                  <a:lnTo>
-                    <a:pt x="1349577" y="747299"/>
-                  </a:lnTo>
-                  <a:lnTo>
-                    <a:pt x="1349577" y="723301"/>
-                  </a:lnTo>
-                  <a:lnTo>
-                    <a:pt x="1433925" y="723301"/>
-                  </a:lnTo>
-                  <a:lnTo>
-                    <a:pt x="1433925" y="699165"/>
-                  </a:lnTo>
-                  <a:lnTo>
-                    <a:pt x="1518274" y="699165"/>
-                  </a:lnTo>
-                  <a:lnTo>
-                    <a:pt x="1518274" y="650706"/>
-                  </a:lnTo>
-                  <a:lnTo>
-                    <a:pt x="1602622" y="650706"/>
-                  </a:lnTo>
-                  <a:lnTo>
-                    <a:pt x="1602622" y="638289"/>
-                  </a:lnTo>
-                  <a:lnTo>
-                    <a:pt x="1686971" y="638289"/>
-                  </a:lnTo>
-                  <a:lnTo>
-                    <a:pt x="1686971" y="625884"/>
-                  </a:lnTo>
-                  <a:lnTo>
-                    <a:pt x="1771320" y="625884"/>
-                  </a:lnTo>
-                  <a:lnTo>
-                    <a:pt x="1771320" y="625884"/>
-                  </a:lnTo>
-                  <a:lnTo>
-                    <a:pt x="1855668" y="625884"/>
-                  </a:lnTo>
-                  <a:lnTo>
-                    <a:pt x="1855668" y="575831"/>
-                  </a:lnTo>
-                  <a:lnTo>
-                    <a:pt x="1940017" y="575831"/>
-                  </a:lnTo>
-                  <a:lnTo>
-                    <a:pt x="1940017" y="575831"/>
-                  </a:lnTo>
-                  <a:lnTo>
-                    <a:pt x="2024365" y="575831"/>
-                  </a:lnTo>
-                  <a:lnTo>
-                    <a:pt x="2024365" y="563148"/>
-                  </a:lnTo>
-                  <a:lnTo>
-                    <a:pt x="2108714" y="563148"/>
-                  </a:lnTo>
-                  <a:lnTo>
-                    <a:pt x="2108714" y="537827"/>
-                  </a:lnTo>
-                  <a:lnTo>
-                    <a:pt x="2193062" y="537827"/>
-                  </a:lnTo>
-                  <a:lnTo>
-                    <a:pt x="2193062" y="487187"/>
-                  </a:lnTo>
-                  <a:lnTo>
-                    <a:pt x="2277411" y="487187"/>
-                  </a:lnTo>
-                  <a:lnTo>
-                    <a:pt x="2277411" y="474131"/>
-                  </a:lnTo>
-                  <a:lnTo>
-                    <a:pt x="2361760" y="474131"/>
-                  </a:lnTo>
-                  <a:lnTo>
-                    <a:pt x="2361760" y="421955"/>
-                  </a:lnTo>
-                  <a:lnTo>
-                    <a:pt x="2446108" y="421955"/>
-                  </a:lnTo>
-                  <a:lnTo>
-                    <a:pt x="2446108" y="382429"/>
-                  </a:lnTo>
-                  <a:lnTo>
-                    <a:pt x="2530457" y="382429"/>
-                  </a:lnTo>
-                  <a:lnTo>
-                    <a:pt x="2530457" y="342752"/>
-                  </a:lnTo>
-                  <a:lnTo>
-                    <a:pt x="2614805" y="342752"/>
-                  </a:lnTo>
-                  <a:lnTo>
-                    <a:pt x="2614805" y="329281"/>
-                  </a:lnTo>
-                  <a:lnTo>
-                    <a:pt x="2699154" y="329281"/>
-                  </a:lnTo>
-                  <a:lnTo>
-                    <a:pt x="2699154" y="329281"/>
-                  </a:lnTo>
-                  <a:lnTo>
-                    <a:pt x="2783503" y="329281"/>
-                  </a:lnTo>
-                  <a:lnTo>
-                    <a:pt x="2783503" y="329281"/>
-                  </a:lnTo>
-                  <a:lnTo>
-                    <a:pt x="2867851" y="329281"/>
-                  </a:lnTo>
-                  <a:lnTo>
-                    <a:pt x="2867851" y="288869"/>
-                  </a:lnTo>
-                  <a:lnTo>
-                    <a:pt x="2952200" y="288869"/>
-                  </a:lnTo>
-                  <a:lnTo>
-                    <a:pt x="2952200" y="261648"/>
-                  </a:lnTo>
-                  <a:lnTo>
-                    <a:pt x="3036548" y="261648"/>
-                  </a:lnTo>
-                  <a:lnTo>
-                    <a:pt x="3036548" y="261648"/>
-                  </a:lnTo>
-                  <a:lnTo>
-                    <a:pt x="3120897" y="261648"/>
-                  </a:lnTo>
-                  <a:lnTo>
-                    <a:pt x="3120897" y="248012"/>
-                  </a:lnTo>
-                  <a:lnTo>
-                    <a:pt x="3205245" y="248012"/>
-                  </a:lnTo>
-                  <a:lnTo>
-                    <a:pt x="3205245" y="234384"/>
-                  </a:lnTo>
-                  <a:lnTo>
-                    <a:pt x="3289594" y="234384"/>
-                  </a:lnTo>
-                  <a:lnTo>
-                    <a:pt x="3289594" y="234384"/>
-                  </a:lnTo>
-                  <a:lnTo>
-                    <a:pt x="3373943" y="234384"/>
-                  </a:lnTo>
-                  <a:lnTo>
-                    <a:pt x="3373943" y="234384"/>
-                  </a:lnTo>
-                  <a:lnTo>
-                    <a:pt x="3458291" y="234384"/>
-                  </a:lnTo>
-                  <a:lnTo>
-                    <a:pt x="3458291" y="234384"/>
-                  </a:lnTo>
-                  <a:lnTo>
-                    <a:pt x="3542640" y="234384"/>
-                  </a:lnTo>
-                  <a:lnTo>
-                    <a:pt x="3542640" y="234384"/>
-                  </a:lnTo>
-                  <a:lnTo>
-                    <a:pt x="3626988" y="234384"/>
-                  </a:lnTo>
-                  <a:lnTo>
-                    <a:pt x="3626988" y="234384"/>
-                  </a:lnTo>
-                  <a:lnTo>
-                    <a:pt x="3711337" y="234384"/>
-                  </a:lnTo>
-                  <a:lnTo>
-                    <a:pt x="3711337" y="234384"/>
-                  </a:lnTo>
-                  <a:lnTo>
-                    <a:pt x="3795685" y="234384"/>
-                  </a:lnTo>
-                  <a:lnTo>
-                    <a:pt x="3795685" y="220745"/>
-                  </a:lnTo>
-                  <a:lnTo>
-                    <a:pt x="3880034" y="220745"/>
-                  </a:lnTo>
-                  <a:lnTo>
-                    <a:pt x="3880034" y="220745"/>
-                  </a:lnTo>
-                  <a:lnTo>
-                    <a:pt x="3964383" y="220745"/>
-                  </a:lnTo>
-                  <a:lnTo>
-                    <a:pt x="3964383" y="207101"/>
-                  </a:lnTo>
-                  <a:lnTo>
-                    <a:pt x="4048731" y="207101"/>
-                  </a:lnTo>
-                  <a:lnTo>
-                    <a:pt x="4048731" y="193458"/>
-                  </a:lnTo>
-                  <a:lnTo>
-                    <a:pt x="4133080" y="193458"/>
-                  </a:lnTo>
-                  <a:lnTo>
-                    <a:pt x="4133080" y="166250"/>
-                  </a:lnTo>
-                  <a:lnTo>
-                    <a:pt x="4217428" y="166250"/>
-                  </a:lnTo>
-                  <a:lnTo>
-                    <a:pt x="4217428" y="166250"/>
-                  </a:lnTo>
-                  <a:lnTo>
-                    <a:pt x="4301777" y="166250"/>
-                  </a:lnTo>
-                  <a:lnTo>
-                    <a:pt x="4301777" y="166250"/>
-                  </a:lnTo>
-                  <a:lnTo>
-                    <a:pt x="4386125" y="166250"/>
-                  </a:lnTo>
-                  <a:lnTo>
-                    <a:pt x="4386125" y="152642"/>
-                  </a:lnTo>
-                  <a:lnTo>
-                    <a:pt x="4470474" y="152642"/>
-                  </a:lnTo>
-                  <a:lnTo>
-                    <a:pt x="4470474" y="152642"/>
-                  </a:lnTo>
-                  <a:lnTo>
-                    <a:pt x="4554823" y="152642"/>
-                  </a:lnTo>
-                  <a:lnTo>
-                    <a:pt x="4554823" y="139025"/>
-                  </a:lnTo>
-                  <a:lnTo>
-                    <a:pt x="4639171" y="139025"/>
-                  </a:lnTo>
-                  <a:lnTo>
-                    <a:pt x="4639171" y="139025"/>
-                  </a:lnTo>
-                  <a:lnTo>
-                    <a:pt x="4723520" y="139025"/>
-                  </a:lnTo>
-                  <a:lnTo>
-                    <a:pt x="4723520" y="139025"/>
-                  </a:lnTo>
-                  <a:lnTo>
-                    <a:pt x="4807868" y="139025"/>
-                  </a:lnTo>
-                  <a:lnTo>
-                    <a:pt x="4807868" y="139025"/>
-                  </a:lnTo>
-                  <a:lnTo>
-                    <a:pt x="4892217" y="139025"/>
-                  </a:lnTo>
-                  <a:lnTo>
-                    <a:pt x="4892217" y="139025"/>
-                  </a:lnTo>
-                  <a:lnTo>
-                    <a:pt x="4976565" y="139025"/>
-                  </a:lnTo>
-                  <a:lnTo>
-                    <a:pt x="4976565" y="125435"/>
-                  </a:lnTo>
-                  <a:lnTo>
-                    <a:pt x="5060914" y="125435"/>
-                  </a:lnTo>
-                  <a:lnTo>
-                    <a:pt x="5060914" y="98352"/>
-                  </a:lnTo>
-                  <a:lnTo>
-                    <a:pt x="5145263" y="98352"/>
-                  </a:lnTo>
-                  <a:lnTo>
-                    <a:pt x="5145263" y="98352"/>
-                  </a:lnTo>
-                  <a:lnTo>
-                    <a:pt x="5229611" y="98352"/>
-                  </a:lnTo>
-                  <a:lnTo>
-                    <a:pt x="5229611" y="98352"/>
-                  </a:lnTo>
-                  <a:lnTo>
-                    <a:pt x="5313960" y="98352"/>
-                  </a:lnTo>
-                  <a:lnTo>
-                    <a:pt x="5313960" y="98352"/>
-                  </a:lnTo>
-                  <a:lnTo>
-                    <a:pt x="5398308" y="98352"/>
-                  </a:lnTo>
-                  <a:lnTo>
-                    <a:pt x="5398308" y="84637"/>
-                  </a:lnTo>
-                  <a:lnTo>
-                    <a:pt x="5482657" y="84637"/>
-                  </a:lnTo>
-                  <a:lnTo>
-                    <a:pt x="5482657" y="70915"/>
-                  </a:lnTo>
-                  <a:lnTo>
-                    <a:pt x="5567006" y="70915"/>
-                  </a:lnTo>
-                  <a:lnTo>
-                    <a:pt x="5567006" y="70915"/>
-                  </a:lnTo>
-                  <a:lnTo>
-                    <a:pt x="5651354" y="70915"/>
-                  </a:lnTo>
-                  <a:lnTo>
-                    <a:pt x="5651354" y="70915"/>
-                  </a:lnTo>
-                  <a:lnTo>
-                    <a:pt x="5735703" y="70915"/>
-                  </a:lnTo>
-                  <a:lnTo>
-                    <a:pt x="5735703" y="57169"/>
-                  </a:lnTo>
-                  <a:lnTo>
-                    <a:pt x="5820051" y="57169"/>
-                  </a:lnTo>
-                  <a:lnTo>
-                    <a:pt x="5820051" y="57169"/>
-                  </a:lnTo>
-                  <a:lnTo>
-                    <a:pt x="5904400" y="57169"/>
-                  </a:lnTo>
-                  <a:lnTo>
-                    <a:pt x="5904400" y="57169"/>
-                  </a:lnTo>
-                  <a:lnTo>
-                    <a:pt x="5988748" y="57169"/>
-                  </a:lnTo>
-                  <a:lnTo>
-                    <a:pt x="5988748" y="57169"/>
-                  </a:lnTo>
-                  <a:lnTo>
-                    <a:pt x="6073097" y="57169"/>
-                  </a:lnTo>
-                  <a:lnTo>
-                    <a:pt x="6073097" y="57169"/>
-                  </a:lnTo>
-                  <a:lnTo>
-                    <a:pt x="6157446" y="57169"/>
-                  </a:lnTo>
-                  <a:lnTo>
-                    <a:pt x="6157446" y="28730"/>
-                  </a:lnTo>
-                  <a:lnTo>
-                    <a:pt x="6241794" y="28730"/>
-                  </a:lnTo>
-                  <a:lnTo>
-                    <a:pt x="6241794" y="28730"/>
-                  </a:lnTo>
-                  <a:lnTo>
-                    <a:pt x="6326143" y="28730"/>
-                  </a:lnTo>
-                  <a:lnTo>
-                    <a:pt x="6326143" y="28730"/>
-                  </a:lnTo>
-                  <a:lnTo>
-                    <a:pt x="6410491" y="28730"/>
-                  </a:lnTo>
-                  <a:lnTo>
-                    <a:pt x="6410491" y="28730"/>
-                  </a:lnTo>
-                  <a:lnTo>
-                    <a:pt x="6494840" y="28730"/>
-                  </a:lnTo>
-                  <a:lnTo>
-                    <a:pt x="6494840" y="28730"/>
-                  </a:lnTo>
-                  <a:lnTo>
-                    <a:pt x="6579188" y="28730"/>
-                  </a:lnTo>
-                  <a:lnTo>
-                    <a:pt x="6579188" y="28730"/>
-                  </a:lnTo>
-                  <a:lnTo>
-                    <a:pt x="6663537" y="28730"/>
-                  </a:lnTo>
-                  <a:lnTo>
-                    <a:pt x="6663537" y="28730"/>
-                  </a:lnTo>
-                  <a:lnTo>
-                    <a:pt x="6747886" y="28730"/>
-                  </a:lnTo>
-                  <a:lnTo>
-                    <a:pt x="6747886" y="14352"/>
-                  </a:lnTo>
-                  <a:lnTo>
-                    <a:pt x="6832234" y="14352"/>
-                  </a:lnTo>
-                  <a:lnTo>
-                    <a:pt x="6832234" y="14352"/>
-                  </a:lnTo>
-                  <a:lnTo>
-                    <a:pt x="6916583" y="14352"/>
-                  </a:lnTo>
-                  <a:lnTo>
-                    <a:pt x="6916583" y="14352"/>
-                  </a:lnTo>
-                  <a:lnTo>
-                    <a:pt x="7000931" y="14352"/>
-                  </a:lnTo>
-                  <a:lnTo>
-                    <a:pt x="7000931" y="14352"/>
-                  </a:lnTo>
-                  <a:lnTo>
-                    <a:pt x="7085280" y="14352"/>
-                  </a:lnTo>
-                  <a:lnTo>
-                    <a:pt x="7085280" y="14352"/>
-                  </a:lnTo>
-                  <a:lnTo>
-                    <a:pt x="7169628" y="14352"/>
-                  </a:lnTo>
-                  <a:lnTo>
-                    <a:pt x="7169628" y="14352"/>
-                  </a:lnTo>
-                  <a:lnTo>
-                    <a:pt x="7253977" y="14352"/>
+                    <a:pt x="84348" y="1553466"/>
+                  </a:lnTo>
+                  <a:lnTo>
+                    <a:pt x="84348" y="1524452"/>
+                  </a:lnTo>
+                  <a:lnTo>
+                    <a:pt x="168697" y="1524452"/>
+                  </a:lnTo>
+                  <a:lnTo>
+                    <a:pt x="168697" y="1495433"/>
+                  </a:lnTo>
+                  <a:lnTo>
+                    <a:pt x="253045" y="1495433"/>
+                  </a:lnTo>
+                  <a:lnTo>
+                    <a:pt x="253045" y="1466197"/>
+                  </a:lnTo>
+                  <a:lnTo>
+                    <a:pt x="337394" y="1466197"/>
+                  </a:lnTo>
+                  <a:lnTo>
+                    <a:pt x="337394" y="1451435"/>
+                  </a:lnTo>
+                  <a:lnTo>
+                    <a:pt x="421742" y="1451435"/>
+                  </a:lnTo>
+                  <a:lnTo>
+                    <a:pt x="421742" y="1421963"/>
+                  </a:lnTo>
+                  <a:lnTo>
+                    <a:pt x="506091" y="1421963"/>
+                  </a:lnTo>
+                  <a:lnTo>
+                    <a:pt x="506091" y="1392468"/>
+                  </a:lnTo>
+                  <a:lnTo>
+                    <a:pt x="590440" y="1392468"/>
+                  </a:lnTo>
+                  <a:lnTo>
+                    <a:pt x="590440" y="1348348"/>
+                  </a:lnTo>
+                  <a:lnTo>
+                    <a:pt x="674788" y="1348348"/>
+                  </a:lnTo>
+                  <a:lnTo>
+                    <a:pt x="674788" y="1333466"/>
+                  </a:lnTo>
+                  <a:lnTo>
+                    <a:pt x="759137" y="1333466"/>
+                  </a:lnTo>
+                  <a:lnTo>
+                    <a:pt x="759137" y="1259855"/>
+                  </a:lnTo>
+                  <a:lnTo>
+                    <a:pt x="843485" y="1259855"/>
+                  </a:lnTo>
+                  <a:lnTo>
+                    <a:pt x="843485" y="1215305"/>
+                  </a:lnTo>
+                  <a:lnTo>
+                    <a:pt x="927834" y="1215305"/>
+                  </a:lnTo>
+                  <a:lnTo>
+                    <a:pt x="927834" y="1155724"/>
+                  </a:lnTo>
+                  <a:lnTo>
+                    <a:pt x="1012182" y="1155724"/>
+                  </a:lnTo>
+                  <a:lnTo>
+                    <a:pt x="1012182" y="1051709"/>
+                  </a:lnTo>
+                  <a:lnTo>
+                    <a:pt x="1096531" y="1051709"/>
+                  </a:lnTo>
+                  <a:lnTo>
+                    <a:pt x="1096531" y="1005519"/>
+                  </a:lnTo>
+                  <a:lnTo>
+                    <a:pt x="1180880" y="1005519"/>
+                  </a:lnTo>
+                  <a:lnTo>
+                    <a:pt x="1180880" y="974317"/>
+                  </a:lnTo>
+                  <a:lnTo>
+                    <a:pt x="1265228" y="974317"/>
+                  </a:lnTo>
+                  <a:lnTo>
+                    <a:pt x="1265228" y="927608"/>
+                  </a:lnTo>
+                  <a:lnTo>
+                    <a:pt x="1349577" y="927608"/>
+                  </a:lnTo>
+                  <a:lnTo>
+                    <a:pt x="1349577" y="896174"/>
+                  </a:lnTo>
+                  <a:lnTo>
+                    <a:pt x="1433925" y="896174"/>
+                  </a:lnTo>
+                  <a:lnTo>
+                    <a:pt x="1433925" y="864665"/>
+                  </a:lnTo>
+                  <a:lnTo>
+                    <a:pt x="1518274" y="864665"/>
+                  </a:lnTo>
+                  <a:lnTo>
+                    <a:pt x="1518274" y="801718"/>
+                  </a:lnTo>
+                  <a:lnTo>
+                    <a:pt x="1602622" y="801718"/>
+                  </a:lnTo>
+                  <a:lnTo>
+                    <a:pt x="1602622" y="785657"/>
+                  </a:lnTo>
+                  <a:lnTo>
+                    <a:pt x="1686971" y="785657"/>
+                  </a:lnTo>
+                  <a:lnTo>
+                    <a:pt x="1686971" y="769642"/>
+                  </a:lnTo>
+                  <a:lnTo>
+                    <a:pt x="1771320" y="769642"/>
+                  </a:lnTo>
+                  <a:lnTo>
+                    <a:pt x="1771320" y="769642"/>
+                  </a:lnTo>
+                  <a:lnTo>
+                    <a:pt x="1855668" y="769642"/>
+                  </a:lnTo>
+                  <a:lnTo>
+                    <a:pt x="1855668" y="705303"/>
+                  </a:lnTo>
+                  <a:lnTo>
+                    <a:pt x="1940017" y="705303"/>
+                  </a:lnTo>
+                  <a:lnTo>
+                    <a:pt x="1940017" y="705303"/>
+                  </a:lnTo>
+                  <a:lnTo>
+                    <a:pt x="2024365" y="705303"/>
+                  </a:lnTo>
+                  <a:lnTo>
+                    <a:pt x="2024365" y="689074"/>
+                  </a:lnTo>
+                  <a:lnTo>
+                    <a:pt x="2108714" y="689074"/>
+                  </a:lnTo>
+                  <a:lnTo>
+                    <a:pt x="2108714" y="656761"/>
+                  </a:lnTo>
+                  <a:lnTo>
+                    <a:pt x="2193062" y="656761"/>
+                  </a:lnTo>
+                  <a:lnTo>
+                    <a:pt x="2193062" y="592503"/>
+                  </a:lnTo>
+                  <a:lnTo>
+                    <a:pt x="2277411" y="592503"/>
+                  </a:lnTo>
+                  <a:lnTo>
+                    <a:pt x="2277411" y="576013"/>
+                  </a:lnTo>
+                  <a:lnTo>
+                    <a:pt x="2361760" y="576013"/>
+                  </a:lnTo>
+                  <a:lnTo>
+                    <a:pt x="2361760" y="510443"/>
+                  </a:lnTo>
+                  <a:lnTo>
+                    <a:pt x="2446108" y="510443"/>
+                  </a:lnTo>
+                  <a:lnTo>
+                    <a:pt x="2446108" y="461118"/>
+                  </a:lnTo>
+                  <a:lnTo>
+                    <a:pt x="2530457" y="461118"/>
+                  </a:lnTo>
+                  <a:lnTo>
+                    <a:pt x="2530457" y="411908"/>
+                  </a:lnTo>
+                  <a:lnTo>
+                    <a:pt x="2614805" y="411908"/>
+                  </a:lnTo>
+                  <a:lnTo>
+                    <a:pt x="2614805" y="395272"/>
+                  </a:lnTo>
+                  <a:lnTo>
+                    <a:pt x="2699154" y="395272"/>
+                  </a:lnTo>
+                  <a:lnTo>
+                    <a:pt x="2699154" y="395272"/>
+                  </a:lnTo>
+                  <a:lnTo>
+                    <a:pt x="2783503" y="395272"/>
+                  </a:lnTo>
+                  <a:lnTo>
+                    <a:pt x="2783503" y="395272"/>
+                  </a:lnTo>
+                  <a:lnTo>
+                    <a:pt x="2867851" y="395272"/>
+                  </a:lnTo>
+                  <a:lnTo>
+                    <a:pt x="2867851" y="345575"/>
+                  </a:lnTo>
+                  <a:lnTo>
+                    <a:pt x="2952200" y="345575"/>
+                  </a:lnTo>
+                  <a:lnTo>
+                    <a:pt x="2952200" y="312284"/>
+                  </a:lnTo>
+                  <a:lnTo>
+                    <a:pt x="3036548" y="312284"/>
+                  </a:lnTo>
+                  <a:lnTo>
+                    <a:pt x="3036548" y="312284"/>
+                  </a:lnTo>
+                  <a:lnTo>
+                    <a:pt x="3120897" y="312284"/>
+                  </a:lnTo>
+                  <a:lnTo>
+                    <a:pt x="3120897" y="295663"/>
+                  </a:lnTo>
+                  <a:lnTo>
+                    <a:pt x="3205245" y="295663"/>
+                  </a:lnTo>
+                  <a:lnTo>
+                    <a:pt x="3205245" y="279088"/>
+                  </a:lnTo>
+                  <a:lnTo>
+                    <a:pt x="3289594" y="279088"/>
+                  </a:lnTo>
+                  <a:lnTo>
+                    <a:pt x="3289594" y="279088"/>
+                  </a:lnTo>
+                  <a:lnTo>
+                    <a:pt x="3373943" y="279088"/>
+                  </a:lnTo>
+                  <a:lnTo>
+                    <a:pt x="3373943" y="279088"/>
+                  </a:lnTo>
+                  <a:lnTo>
+                    <a:pt x="3458291" y="279088"/>
+                  </a:lnTo>
+                  <a:lnTo>
+                    <a:pt x="3458291" y="279088"/>
+                  </a:lnTo>
+                  <a:lnTo>
+                    <a:pt x="3542640" y="279088"/>
+                  </a:lnTo>
+                  <a:lnTo>
+                    <a:pt x="3542640" y="279088"/>
+                  </a:lnTo>
+                  <a:lnTo>
+                    <a:pt x="3626988" y="279088"/>
+                  </a:lnTo>
+                  <a:lnTo>
+                    <a:pt x="3626988" y="279088"/>
+                  </a:lnTo>
+                  <a:lnTo>
+                    <a:pt x="3711337" y="279088"/>
+                  </a:lnTo>
+                  <a:lnTo>
+                    <a:pt x="3711337" y="279088"/>
+                  </a:lnTo>
+                  <a:lnTo>
+                    <a:pt x="3795685" y="279088"/>
+                  </a:lnTo>
+                  <a:lnTo>
+                    <a:pt x="3795685" y="262537"/>
+                  </a:lnTo>
+                  <a:lnTo>
+                    <a:pt x="3880034" y="262537"/>
+                  </a:lnTo>
+                  <a:lnTo>
+                    <a:pt x="3880034" y="262537"/>
+                  </a:lnTo>
+                  <a:lnTo>
+                    <a:pt x="3964383" y="262537"/>
+                  </a:lnTo>
+                  <a:lnTo>
+                    <a:pt x="3964383" y="246019"/>
+                  </a:lnTo>
+                  <a:lnTo>
+                    <a:pt x="4048731" y="246019"/>
+                  </a:lnTo>
+                  <a:lnTo>
+                    <a:pt x="4048731" y="229540"/>
+                  </a:lnTo>
+                  <a:lnTo>
+                    <a:pt x="4133080" y="229540"/>
+                  </a:lnTo>
+                  <a:lnTo>
+                    <a:pt x="4133080" y="196787"/>
+                  </a:lnTo>
+                  <a:lnTo>
+                    <a:pt x="4217428" y="196787"/>
+                  </a:lnTo>
+                  <a:lnTo>
+                    <a:pt x="4217428" y="196787"/>
+                  </a:lnTo>
+                  <a:lnTo>
+                    <a:pt x="4301777" y="196787"/>
+                  </a:lnTo>
+                  <a:lnTo>
+                    <a:pt x="4301777" y="196787"/>
+                  </a:lnTo>
+                  <a:lnTo>
+                    <a:pt x="4386125" y="196787"/>
+                  </a:lnTo>
+                  <a:lnTo>
+                    <a:pt x="4386125" y="180464"/>
+                  </a:lnTo>
+                  <a:lnTo>
+                    <a:pt x="4470474" y="180464"/>
+                  </a:lnTo>
+                  <a:lnTo>
+                    <a:pt x="4470474" y="180464"/>
+                  </a:lnTo>
+                  <a:lnTo>
+                    <a:pt x="4554823" y="180464"/>
+                  </a:lnTo>
+                  <a:lnTo>
+                    <a:pt x="4554823" y="164166"/>
+                  </a:lnTo>
+                  <a:lnTo>
+                    <a:pt x="4639171" y="164166"/>
+                  </a:lnTo>
+                  <a:lnTo>
+                    <a:pt x="4639171" y="164166"/>
+                  </a:lnTo>
+                  <a:lnTo>
+                    <a:pt x="4723520" y="164166"/>
+                  </a:lnTo>
+                  <a:lnTo>
+                    <a:pt x="4723520" y="164166"/>
+                  </a:lnTo>
+                  <a:lnTo>
+                    <a:pt x="4807868" y="164166"/>
+                  </a:lnTo>
+                  <a:lnTo>
+                    <a:pt x="4807868" y="164166"/>
+                  </a:lnTo>
+                  <a:lnTo>
+                    <a:pt x="4892217" y="164166"/>
+                  </a:lnTo>
+                  <a:lnTo>
+                    <a:pt x="4892217" y="164166"/>
+                  </a:lnTo>
+                  <a:lnTo>
+                    <a:pt x="4976565" y="164166"/>
+                  </a:lnTo>
+                  <a:lnTo>
+                    <a:pt x="4976565" y="147940"/>
+                  </a:lnTo>
+                  <a:lnTo>
+                    <a:pt x="5060914" y="147940"/>
+                  </a:lnTo>
+                  <a:lnTo>
+                    <a:pt x="5060914" y="115719"/>
+                  </a:lnTo>
+                  <a:lnTo>
+                    <a:pt x="5145263" y="115719"/>
+                  </a:lnTo>
+                  <a:lnTo>
+                    <a:pt x="5145263" y="115719"/>
+                  </a:lnTo>
+                  <a:lnTo>
+                    <a:pt x="5229611" y="115719"/>
+                  </a:lnTo>
+                  <a:lnTo>
+                    <a:pt x="5229611" y="115719"/>
+                  </a:lnTo>
+                  <a:lnTo>
+                    <a:pt x="5313960" y="115719"/>
+                  </a:lnTo>
+                  <a:lnTo>
+                    <a:pt x="5313960" y="115719"/>
+                  </a:lnTo>
+                  <a:lnTo>
+                    <a:pt x="5398308" y="115719"/>
+                  </a:lnTo>
+                  <a:lnTo>
+                    <a:pt x="5398308" y="99459"/>
+                  </a:lnTo>
+                  <a:lnTo>
+                    <a:pt x="5482657" y="99459"/>
+                  </a:lnTo>
+                  <a:lnTo>
+                    <a:pt x="5482657" y="83231"/>
+                  </a:lnTo>
+                  <a:lnTo>
+                    <a:pt x="5567006" y="83231"/>
+                  </a:lnTo>
+                  <a:lnTo>
+                    <a:pt x="5567006" y="83231"/>
+                  </a:lnTo>
+                  <a:lnTo>
+                    <a:pt x="5651354" y="83231"/>
+                  </a:lnTo>
+                  <a:lnTo>
+                    <a:pt x="5651354" y="83231"/>
+                  </a:lnTo>
+                  <a:lnTo>
+                    <a:pt x="5735703" y="83231"/>
+                  </a:lnTo>
+                  <a:lnTo>
+                    <a:pt x="5735703" y="67014"/>
+                  </a:lnTo>
+                  <a:lnTo>
+                    <a:pt x="5820051" y="67014"/>
+                  </a:lnTo>
+                  <a:lnTo>
+                    <a:pt x="5820051" y="67014"/>
+                  </a:lnTo>
+                  <a:lnTo>
+                    <a:pt x="5904400" y="67014"/>
+                  </a:lnTo>
+                  <a:lnTo>
+                    <a:pt x="5904400" y="67014"/>
+                  </a:lnTo>
+                  <a:lnTo>
+                    <a:pt x="5988748" y="67014"/>
+                  </a:lnTo>
+                  <a:lnTo>
+                    <a:pt x="5988748" y="67014"/>
+                  </a:lnTo>
+                  <a:lnTo>
+                    <a:pt x="6073097" y="67014"/>
+                  </a:lnTo>
+                  <a:lnTo>
+                    <a:pt x="6073097" y="67014"/>
+                  </a:lnTo>
+                  <a:lnTo>
+                    <a:pt x="6157446" y="67014"/>
+                  </a:lnTo>
+                  <a:lnTo>
+                    <a:pt x="6157446" y="33591"/>
+                  </a:lnTo>
+                  <a:lnTo>
+                    <a:pt x="6241794" y="33591"/>
+                  </a:lnTo>
+                  <a:lnTo>
+                    <a:pt x="6241794" y="33591"/>
+                  </a:lnTo>
+                  <a:lnTo>
+                    <a:pt x="6326143" y="33591"/>
+                  </a:lnTo>
+                  <a:lnTo>
+                    <a:pt x="6326143" y="33591"/>
+                  </a:lnTo>
+                  <a:lnTo>
+                    <a:pt x="6410491" y="33591"/>
+                  </a:lnTo>
+                  <a:lnTo>
+                    <a:pt x="6410491" y="33591"/>
+                  </a:lnTo>
+                  <a:lnTo>
+                    <a:pt x="6494840" y="33591"/>
+                  </a:lnTo>
+                  <a:lnTo>
+                    <a:pt x="6494840" y="33591"/>
+                  </a:lnTo>
+                  <a:lnTo>
+                    <a:pt x="6579188" y="33591"/>
+                  </a:lnTo>
+                  <a:lnTo>
+                    <a:pt x="6579188" y="33591"/>
+                  </a:lnTo>
+                  <a:lnTo>
+                    <a:pt x="6663537" y="33591"/>
+                  </a:lnTo>
+                  <a:lnTo>
+                    <a:pt x="6663537" y="33591"/>
+                  </a:lnTo>
+                  <a:lnTo>
+                    <a:pt x="6747886" y="33591"/>
+                  </a:lnTo>
+                  <a:lnTo>
+                    <a:pt x="6747886" y="16759"/>
+                  </a:lnTo>
+                  <a:lnTo>
+                    <a:pt x="6832234" y="16759"/>
+                  </a:lnTo>
+                  <a:lnTo>
+                    <a:pt x="6832234" y="16759"/>
+                  </a:lnTo>
+                  <a:lnTo>
+                    <a:pt x="6916583" y="16759"/>
+                  </a:lnTo>
+                  <a:lnTo>
+                    <a:pt x="6916583" y="16759"/>
+                  </a:lnTo>
+                  <a:lnTo>
+                    <a:pt x="7000931" y="16759"/>
+                  </a:lnTo>
+                  <a:lnTo>
+                    <a:pt x="7000931" y="16759"/>
+                  </a:lnTo>
+                  <a:lnTo>
+                    <a:pt x="7085280" y="16759"/>
+                  </a:lnTo>
+                  <a:lnTo>
+                    <a:pt x="7085280" y="16759"/>
+                  </a:lnTo>
+                  <a:lnTo>
+                    <a:pt x="7169628" y="16759"/>
+                  </a:lnTo>
+                  <a:lnTo>
+                    <a:pt x="7169628" y="16759"/>
+                  </a:lnTo>
+                  <a:lnTo>
+                    <a:pt x="7253977" y="16759"/>
                   </a:lnTo>
                   <a:lnTo>
                     <a:pt x="7253977" y="0"/>
@@ -3531,528 +3531,528 @@
           </p:nvSpPr>
           <p:spPr>
             <a:xfrm>
-              <a:off x="1019512" y="3511428"/>
-              <a:ext cx="7591371" cy="1553466"/>
+              <a:off x="1019512" y="3854707"/>
+              <a:ext cx="7591371" cy="1210188"/>
             </a:xfrm>
             <a:custGeom>
               <a:avLst/>
               <a:pathLst>
-                <a:path w="7591371" h="1553466">
+                <a:path w="7591371" h="1210188">
                   <a:moveTo>
-                    <a:pt x="0" y="1553466"/>
+                    <a:pt x="0" y="1210188"/>
                   </a:moveTo>
                   <a:lnTo>
-                    <a:pt x="84348" y="1553466"/>
-                  </a:lnTo>
-                  <a:lnTo>
-                    <a:pt x="84348" y="1524452"/>
-                  </a:lnTo>
-                  <a:lnTo>
-                    <a:pt x="168697" y="1524452"/>
-                  </a:lnTo>
-                  <a:lnTo>
-                    <a:pt x="168697" y="1495433"/>
-                  </a:lnTo>
-                  <a:lnTo>
-                    <a:pt x="253045" y="1495433"/>
-                  </a:lnTo>
-                  <a:lnTo>
-                    <a:pt x="253045" y="1466197"/>
-                  </a:lnTo>
-                  <a:lnTo>
-                    <a:pt x="337394" y="1466197"/>
-                  </a:lnTo>
-                  <a:lnTo>
-                    <a:pt x="337394" y="1451435"/>
-                  </a:lnTo>
-                  <a:lnTo>
-                    <a:pt x="421742" y="1451435"/>
-                  </a:lnTo>
-                  <a:lnTo>
-                    <a:pt x="421742" y="1421963"/>
-                  </a:lnTo>
-                  <a:lnTo>
-                    <a:pt x="506091" y="1421963"/>
-                  </a:lnTo>
-                  <a:lnTo>
-                    <a:pt x="506091" y="1392468"/>
-                  </a:lnTo>
-                  <a:lnTo>
-                    <a:pt x="590440" y="1392468"/>
-                  </a:lnTo>
-                  <a:lnTo>
-                    <a:pt x="590440" y="1348348"/>
-                  </a:lnTo>
-                  <a:lnTo>
-                    <a:pt x="674788" y="1348348"/>
-                  </a:lnTo>
-                  <a:lnTo>
-                    <a:pt x="674788" y="1333466"/>
-                  </a:lnTo>
-                  <a:lnTo>
-                    <a:pt x="759137" y="1333466"/>
-                  </a:lnTo>
-                  <a:lnTo>
-                    <a:pt x="759137" y="1259855"/>
-                  </a:lnTo>
-                  <a:lnTo>
-                    <a:pt x="843485" y="1259855"/>
-                  </a:lnTo>
-                  <a:lnTo>
-                    <a:pt x="843485" y="1215305"/>
-                  </a:lnTo>
-                  <a:lnTo>
-                    <a:pt x="927834" y="1215305"/>
-                  </a:lnTo>
-                  <a:lnTo>
-                    <a:pt x="927834" y="1155724"/>
-                  </a:lnTo>
-                  <a:lnTo>
-                    <a:pt x="1012182" y="1155724"/>
-                  </a:lnTo>
-                  <a:lnTo>
-                    <a:pt x="1012182" y="1051709"/>
-                  </a:lnTo>
-                  <a:lnTo>
-                    <a:pt x="1096531" y="1051709"/>
-                  </a:lnTo>
-                  <a:lnTo>
-                    <a:pt x="1096531" y="1005519"/>
-                  </a:lnTo>
-                  <a:lnTo>
-                    <a:pt x="1180880" y="1005519"/>
-                  </a:lnTo>
-                  <a:lnTo>
-                    <a:pt x="1180880" y="974317"/>
-                  </a:lnTo>
-                  <a:lnTo>
-                    <a:pt x="1265228" y="974317"/>
-                  </a:lnTo>
-                  <a:lnTo>
-                    <a:pt x="1265228" y="927608"/>
-                  </a:lnTo>
-                  <a:lnTo>
-                    <a:pt x="1349577" y="927608"/>
-                  </a:lnTo>
-                  <a:lnTo>
-                    <a:pt x="1349577" y="896174"/>
-                  </a:lnTo>
-                  <a:lnTo>
-                    <a:pt x="1433925" y="896174"/>
-                  </a:lnTo>
-                  <a:lnTo>
-                    <a:pt x="1433925" y="864665"/>
-                  </a:lnTo>
-                  <a:lnTo>
-                    <a:pt x="1518274" y="864665"/>
-                  </a:lnTo>
-                  <a:lnTo>
-                    <a:pt x="1518274" y="801718"/>
-                  </a:lnTo>
-                  <a:lnTo>
-                    <a:pt x="1602622" y="801718"/>
-                  </a:lnTo>
-                  <a:lnTo>
-                    <a:pt x="1602622" y="785657"/>
-                  </a:lnTo>
-                  <a:lnTo>
-                    <a:pt x="1686971" y="785657"/>
-                  </a:lnTo>
-                  <a:lnTo>
-                    <a:pt x="1686971" y="769642"/>
-                  </a:lnTo>
-                  <a:lnTo>
-                    <a:pt x="1771320" y="769642"/>
-                  </a:lnTo>
-                  <a:lnTo>
-                    <a:pt x="1771320" y="769642"/>
-                  </a:lnTo>
-                  <a:lnTo>
-                    <a:pt x="1855668" y="769642"/>
-                  </a:lnTo>
-                  <a:lnTo>
-                    <a:pt x="1855668" y="705303"/>
-                  </a:lnTo>
-                  <a:lnTo>
-                    <a:pt x="1940017" y="705303"/>
-                  </a:lnTo>
-                  <a:lnTo>
-                    <a:pt x="1940017" y="705303"/>
-                  </a:lnTo>
-                  <a:lnTo>
-                    <a:pt x="2024365" y="705303"/>
-                  </a:lnTo>
-                  <a:lnTo>
-                    <a:pt x="2024365" y="689074"/>
-                  </a:lnTo>
-                  <a:lnTo>
-                    <a:pt x="2108714" y="689074"/>
-                  </a:lnTo>
-                  <a:lnTo>
-                    <a:pt x="2108714" y="656761"/>
-                  </a:lnTo>
-                  <a:lnTo>
-                    <a:pt x="2193062" y="656761"/>
-                  </a:lnTo>
-                  <a:lnTo>
-                    <a:pt x="2193062" y="592503"/>
-                  </a:lnTo>
-                  <a:lnTo>
-                    <a:pt x="2277411" y="592503"/>
-                  </a:lnTo>
-                  <a:lnTo>
-                    <a:pt x="2277411" y="576013"/>
-                  </a:lnTo>
-                  <a:lnTo>
-                    <a:pt x="2361760" y="576013"/>
-                  </a:lnTo>
-                  <a:lnTo>
-                    <a:pt x="2361760" y="510443"/>
-                  </a:lnTo>
-                  <a:lnTo>
-                    <a:pt x="2446108" y="510443"/>
-                  </a:lnTo>
-                  <a:lnTo>
-                    <a:pt x="2446108" y="461118"/>
-                  </a:lnTo>
-                  <a:lnTo>
-                    <a:pt x="2530457" y="461118"/>
-                  </a:lnTo>
-                  <a:lnTo>
-                    <a:pt x="2530457" y="411908"/>
-                  </a:lnTo>
-                  <a:lnTo>
-                    <a:pt x="2614805" y="411908"/>
-                  </a:lnTo>
-                  <a:lnTo>
-                    <a:pt x="2614805" y="395272"/>
-                  </a:lnTo>
-                  <a:lnTo>
-                    <a:pt x="2699154" y="395272"/>
-                  </a:lnTo>
-                  <a:lnTo>
-                    <a:pt x="2699154" y="395272"/>
-                  </a:lnTo>
-                  <a:lnTo>
-                    <a:pt x="2783503" y="395272"/>
-                  </a:lnTo>
-                  <a:lnTo>
-                    <a:pt x="2783503" y="395272"/>
-                  </a:lnTo>
-                  <a:lnTo>
-                    <a:pt x="2867851" y="395272"/>
-                  </a:lnTo>
-                  <a:lnTo>
-                    <a:pt x="2867851" y="345575"/>
-                  </a:lnTo>
-                  <a:lnTo>
-                    <a:pt x="2952200" y="345575"/>
-                  </a:lnTo>
-                  <a:lnTo>
-                    <a:pt x="2952200" y="312284"/>
-                  </a:lnTo>
-                  <a:lnTo>
-                    <a:pt x="3036548" y="312284"/>
-                  </a:lnTo>
-                  <a:lnTo>
-                    <a:pt x="3036548" y="312284"/>
-                  </a:lnTo>
-                  <a:lnTo>
-                    <a:pt x="3120897" y="312284"/>
-                  </a:lnTo>
-                  <a:lnTo>
-                    <a:pt x="3120897" y="295663"/>
-                  </a:lnTo>
-                  <a:lnTo>
-                    <a:pt x="3205245" y="295663"/>
-                  </a:lnTo>
-                  <a:lnTo>
-                    <a:pt x="3205245" y="279088"/>
-                  </a:lnTo>
-                  <a:lnTo>
-                    <a:pt x="3289594" y="279088"/>
-                  </a:lnTo>
-                  <a:lnTo>
-                    <a:pt x="3289594" y="279088"/>
-                  </a:lnTo>
-                  <a:lnTo>
-                    <a:pt x="3373943" y="279088"/>
-                  </a:lnTo>
-                  <a:lnTo>
-                    <a:pt x="3373943" y="279088"/>
-                  </a:lnTo>
-                  <a:lnTo>
-                    <a:pt x="3458291" y="279088"/>
-                  </a:lnTo>
-                  <a:lnTo>
-                    <a:pt x="3458291" y="279088"/>
-                  </a:lnTo>
-                  <a:lnTo>
-                    <a:pt x="3542640" y="279088"/>
-                  </a:lnTo>
-                  <a:lnTo>
-                    <a:pt x="3542640" y="279088"/>
-                  </a:lnTo>
-                  <a:lnTo>
-                    <a:pt x="3626988" y="279088"/>
-                  </a:lnTo>
-                  <a:lnTo>
-                    <a:pt x="3626988" y="279088"/>
-                  </a:lnTo>
-                  <a:lnTo>
-                    <a:pt x="3711337" y="279088"/>
-                  </a:lnTo>
-                  <a:lnTo>
-                    <a:pt x="3711337" y="279088"/>
-                  </a:lnTo>
-                  <a:lnTo>
-                    <a:pt x="3795685" y="279088"/>
-                  </a:lnTo>
-                  <a:lnTo>
-                    <a:pt x="3795685" y="262537"/>
-                  </a:lnTo>
-                  <a:lnTo>
-                    <a:pt x="3880034" y="262537"/>
-                  </a:lnTo>
-                  <a:lnTo>
-                    <a:pt x="3880034" y="262537"/>
-                  </a:lnTo>
-                  <a:lnTo>
-                    <a:pt x="3964383" y="262537"/>
-                  </a:lnTo>
-                  <a:lnTo>
-                    <a:pt x="3964383" y="246019"/>
-                  </a:lnTo>
-                  <a:lnTo>
-                    <a:pt x="4048731" y="246019"/>
-                  </a:lnTo>
-                  <a:lnTo>
-                    <a:pt x="4048731" y="229540"/>
-                  </a:lnTo>
-                  <a:lnTo>
-                    <a:pt x="4133080" y="229540"/>
-                  </a:lnTo>
-                  <a:lnTo>
-                    <a:pt x="4133080" y="196787"/>
-                  </a:lnTo>
-                  <a:lnTo>
-                    <a:pt x="4217428" y="196787"/>
-                  </a:lnTo>
-                  <a:lnTo>
-                    <a:pt x="4217428" y="196787"/>
-                  </a:lnTo>
-                  <a:lnTo>
-                    <a:pt x="4301777" y="196787"/>
-                  </a:lnTo>
-                  <a:lnTo>
-                    <a:pt x="4301777" y="196787"/>
-                  </a:lnTo>
-                  <a:lnTo>
-                    <a:pt x="4386125" y="196787"/>
-                  </a:lnTo>
-                  <a:lnTo>
-                    <a:pt x="4386125" y="180464"/>
-                  </a:lnTo>
-                  <a:lnTo>
-                    <a:pt x="4470474" y="180464"/>
-                  </a:lnTo>
-                  <a:lnTo>
-                    <a:pt x="4470474" y="180464"/>
-                  </a:lnTo>
-                  <a:lnTo>
-                    <a:pt x="4554823" y="180464"/>
-                  </a:lnTo>
-                  <a:lnTo>
-                    <a:pt x="4554823" y="164166"/>
-                  </a:lnTo>
-                  <a:lnTo>
-                    <a:pt x="4639171" y="164166"/>
-                  </a:lnTo>
-                  <a:lnTo>
-                    <a:pt x="4639171" y="164166"/>
-                  </a:lnTo>
-                  <a:lnTo>
-                    <a:pt x="4723520" y="164166"/>
-                  </a:lnTo>
-                  <a:lnTo>
-                    <a:pt x="4723520" y="164166"/>
-                  </a:lnTo>
-                  <a:lnTo>
-                    <a:pt x="4807868" y="164166"/>
-                  </a:lnTo>
-                  <a:lnTo>
-                    <a:pt x="4807868" y="164166"/>
-                  </a:lnTo>
-                  <a:lnTo>
-                    <a:pt x="4892217" y="164166"/>
-                  </a:lnTo>
-                  <a:lnTo>
-                    <a:pt x="4892217" y="164166"/>
-                  </a:lnTo>
-                  <a:lnTo>
-                    <a:pt x="4976565" y="164166"/>
-                  </a:lnTo>
-                  <a:lnTo>
-                    <a:pt x="4976565" y="147940"/>
-                  </a:lnTo>
-                  <a:lnTo>
-                    <a:pt x="5060914" y="147940"/>
-                  </a:lnTo>
-                  <a:lnTo>
-                    <a:pt x="5060914" y="115719"/>
-                  </a:lnTo>
-                  <a:lnTo>
-                    <a:pt x="5145263" y="115719"/>
-                  </a:lnTo>
-                  <a:lnTo>
-                    <a:pt x="5145263" y="115719"/>
-                  </a:lnTo>
-                  <a:lnTo>
-                    <a:pt x="5229611" y="115719"/>
-                  </a:lnTo>
-                  <a:lnTo>
-                    <a:pt x="5229611" y="115719"/>
-                  </a:lnTo>
-                  <a:lnTo>
-                    <a:pt x="5313960" y="115719"/>
-                  </a:lnTo>
-                  <a:lnTo>
-                    <a:pt x="5313960" y="115719"/>
-                  </a:lnTo>
-                  <a:lnTo>
-                    <a:pt x="5398308" y="115719"/>
-                  </a:lnTo>
-                  <a:lnTo>
-                    <a:pt x="5398308" y="99459"/>
-                  </a:lnTo>
-                  <a:lnTo>
-                    <a:pt x="5482657" y="99459"/>
-                  </a:lnTo>
-                  <a:lnTo>
-                    <a:pt x="5482657" y="83231"/>
-                  </a:lnTo>
-                  <a:lnTo>
-                    <a:pt x="5567006" y="83231"/>
-                  </a:lnTo>
-                  <a:lnTo>
-                    <a:pt x="5567006" y="83231"/>
-                  </a:lnTo>
-                  <a:lnTo>
-                    <a:pt x="5651354" y="83231"/>
-                  </a:lnTo>
-                  <a:lnTo>
-                    <a:pt x="5651354" y="83231"/>
-                  </a:lnTo>
-                  <a:lnTo>
-                    <a:pt x="5735703" y="83231"/>
-                  </a:lnTo>
-                  <a:lnTo>
-                    <a:pt x="5735703" y="67014"/>
-                  </a:lnTo>
-                  <a:lnTo>
-                    <a:pt x="5820051" y="67014"/>
-                  </a:lnTo>
-                  <a:lnTo>
-                    <a:pt x="5820051" y="67014"/>
-                  </a:lnTo>
-                  <a:lnTo>
-                    <a:pt x="5904400" y="67014"/>
-                  </a:lnTo>
-                  <a:lnTo>
-                    <a:pt x="5904400" y="67014"/>
-                  </a:lnTo>
-                  <a:lnTo>
-                    <a:pt x="5988748" y="67014"/>
-                  </a:lnTo>
-                  <a:lnTo>
-                    <a:pt x="5988748" y="67014"/>
-                  </a:lnTo>
-                  <a:lnTo>
-                    <a:pt x="6073097" y="67014"/>
-                  </a:lnTo>
-                  <a:lnTo>
-                    <a:pt x="6073097" y="67014"/>
-                  </a:lnTo>
-                  <a:lnTo>
-                    <a:pt x="6157446" y="67014"/>
-                  </a:lnTo>
-                  <a:lnTo>
-                    <a:pt x="6157446" y="33591"/>
-                  </a:lnTo>
-                  <a:lnTo>
-                    <a:pt x="6241794" y="33591"/>
-                  </a:lnTo>
-                  <a:lnTo>
-                    <a:pt x="6241794" y="33591"/>
-                  </a:lnTo>
-                  <a:lnTo>
-                    <a:pt x="6326143" y="33591"/>
-                  </a:lnTo>
-                  <a:lnTo>
-                    <a:pt x="6326143" y="33591"/>
-                  </a:lnTo>
-                  <a:lnTo>
-                    <a:pt x="6410491" y="33591"/>
-                  </a:lnTo>
-                  <a:lnTo>
-                    <a:pt x="6410491" y="33591"/>
-                  </a:lnTo>
-                  <a:lnTo>
-                    <a:pt x="6494840" y="33591"/>
-                  </a:lnTo>
-                  <a:lnTo>
-                    <a:pt x="6494840" y="33591"/>
-                  </a:lnTo>
-                  <a:lnTo>
-                    <a:pt x="6579188" y="33591"/>
-                  </a:lnTo>
-                  <a:lnTo>
-                    <a:pt x="6579188" y="33591"/>
-                  </a:lnTo>
-                  <a:lnTo>
-                    <a:pt x="6663537" y="33591"/>
-                  </a:lnTo>
-                  <a:lnTo>
-                    <a:pt x="6663537" y="33591"/>
-                  </a:lnTo>
-                  <a:lnTo>
-                    <a:pt x="6747886" y="33591"/>
-                  </a:lnTo>
-                  <a:lnTo>
-                    <a:pt x="6747886" y="16759"/>
-                  </a:lnTo>
-                  <a:lnTo>
-                    <a:pt x="6832234" y="16759"/>
-                  </a:lnTo>
-                  <a:lnTo>
-                    <a:pt x="6832234" y="16759"/>
-                  </a:lnTo>
-                  <a:lnTo>
-                    <a:pt x="6916583" y="16759"/>
-                  </a:lnTo>
-                  <a:lnTo>
-                    <a:pt x="6916583" y="16759"/>
-                  </a:lnTo>
-                  <a:lnTo>
-                    <a:pt x="7000931" y="16759"/>
-                  </a:lnTo>
-                  <a:lnTo>
-                    <a:pt x="7000931" y="16759"/>
-                  </a:lnTo>
-                  <a:lnTo>
-                    <a:pt x="7085280" y="16759"/>
-                  </a:lnTo>
-                  <a:lnTo>
-                    <a:pt x="7085280" y="16759"/>
-                  </a:lnTo>
-                  <a:lnTo>
-                    <a:pt x="7169628" y="16759"/>
-                  </a:lnTo>
-                  <a:lnTo>
-                    <a:pt x="7169628" y="16759"/>
-                  </a:lnTo>
-                  <a:lnTo>
-                    <a:pt x="7253977" y="16759"/>
+                    <a:pt x="84348" y="1210188"/>
+                  </a:lnTo>
+                  <a:lnTo>
+                    <a:pt x="84348" y="1189303"/>
+                  </a:lnTo>
+                  <a:lnTo>
+                    <a:pt x="168697" y="1189303"/>
+                  </a:lnTo>
+                  <a:lnTo>
+                    <a:pt x="168697" y="1168363"/>
+                  </a:lnTo>
+                  <a:lnTo>
+                    <a:pt x="253045" y="1168363"/>
+                  </a:lnTo>
+                  <a:lnTo>
+                    <a:pt x="253045" y="1147214"/>
+                  </a:lnTo>
+                  <a:lnTo>
+                    <a:pt x="337394" y="1147214"/>
+                  </a:lnTo>
+                  <a:lnTo>
+                    <a:pt x="337394" y="1136514"/>
+                  </a:lnTo>
+                  <a:lnTo>
+                    <a:pt x="421742" y="1136514"/>
+                  </a:lnTo>
+                  <a:lnTo>
+                    <a:pt x="421742" y="1115113"/>
+                  </a:lnTo>
+                  <a:lnTo>
+                    <a:pt x="506091" y="1115113"/>
+                  </a:lnTo>
+                  <a:lnTo>
+                    <a:pt x="506091" y="1093639"/>
+                  </a:lnTo>
+                  <a:lnTo>
+                    <a:pt x="590440" y="1093639"/>
+                  </a:lnTo>
+                  <a:lnTo>
+                    <a:pt x="590440" y="1061412"/>
+                  </a:lnTo>
+                  <a:lnTo>
+                    <a:pt x="674788" y="1061412"/>
+                  </a:lnTo>
+                  <a:lnTo>
+                    <a:pt x="674788" y="1050513"/>
+                  </a:lnTo>
+                  <a:lnTo>
+                    <a:pt x="759137" y="1050513"/>
+                  </a:lnTo>
+                  <a:lnTo>
+                    <a:pt x="759137" y="996385"/>
+                  </a:lnTo>
+                  <a:lnTo>
+                    <a:pt x="843485" y="996385"/>
+                  </a:lnTo>
+                  <a:lnTo>
+                    <a:pt x="843485" y="963447"/>
+                  </a:lnTo>
+                  <a:lnTo>
+                    <a:pt x="927834" y="963447"/>
+                  </a:lnTo>
+                  <a:lnTo>
+                    <a:pt x="927834" y="919181"/>
+                  </a:lnTo>
+                  <a:lnTo>
+                    <a:pt x="1012182" y="919181"/>
+                  </a:lnTo>
+                  <a:lnTo>
+                    <a:pt x="1012182" y="841291"/>
+                  </a:lnTo>
+                  <a:lnTo>
+                    <a:pt x="1096531" y="841291"/>
+                  </a:lnTo>
+                  <a:lnTo>
+                    <a:pt x="1096531" y="806446"/>
+                  </a:lnTo>
+                  <a:lnTo>
+                    <a:pt x="1180880" y="806446"/>
+                  </a:lnTo>
+                  <a:lnTo>
+                    <a:pt x="1180880" y="782815"/>
+                  </a:lnTo>
+                  <a:lnTo>
+                    <a:pt x="1265228" y="782815"/>
+                  </a:lnTo>
+                  <a:lnTo>
+                    <a:pt x="1265228" y="747299"/>
+                  </a:lnTo>
+                  <a:lnTo>
+                    <a:pt x="1349577" y="747299"/>
+                  </a:lnTo>
+                  <a:lnTo>
+                    <a:pt x="1349577" y="723301"/>
+                  </a:lnTo>
+                  <a:lnTo>
+                    <a:pt x="1433925" y="723301"/>
+                  </a:lnTo>
+                  <a:lnTo>
+                    <a:pt x="1433925" y="699165"/>
+                  </a:lnTo>
+                  <a:lnTo>
+                    <a:pt x="1518274" y="699165"/>
+                  </a:lnTo>
+                  <a:lnTo>
+                    <a:pt x="1518274" y="650706"/>
+                  </a:lnTo>
+                  <a:lnTo>
+                    <a:pt x="1602622" y="650706"/>
+                  </a:lnTo>
+                  <a:lnTo>
+                    <a:pt x="1602622" y="638289"/>
+                  </a:lnTo>
+                  <a:lnTo>
+                    <a:pt x="1686971" y="638289"/>
+                  </a:lnTo>
+                  <a:lnTo>
+                    <a:pt x="1686971" y="625884"/>
+                  </a:lnTo>
+                  <a:lnTo>
+                    <a:pt x="1771320" y="625884"/>
+                  </a:lnTo>
+                  <a:lnTo>
+                    <a:pt x="1771320" y="625884"/>
+                  </a:lnTo>
+                  <a:lnTo>
+                    <a:pt x="1855668" y="625884"/>
+                  </a:lnTo>
+                  <a:lnTo>
+                    <a:pt x="1855668" y="575831"/>
+                  </a:lnTo>
+                  <a:lnTo>
+                    <a:pt x="1940017" y="575831"/>
+                  </a:lnTo>
+                  <a:lnTo>
+                    <a:pt x="1940017" y="575831"/>
+                  </a:lnTo>
+                  <a:lnTo>
+                    <a:pt x="2024365" y="575831"/>
+                  </a:lnTo>
+                  <a:lnTo>
+                    <a:pt x="2024365" y="563148"/>
+                  </a:lnTo>
+                  <a:lnTo>
+                    <a:pt x="2108714" y="563148"/>
+                  </a:lnTo>
+                  <a:lnTo>
+                    <a:pt x="2108714" y="537827"/>
+                  </a:lnTo>
+                  <a:lnTo>
+                    <a:pt x="2193062" y="537827"/>
+                  </a:lnTo>
+                  <a:lnTo>
+                    <a:pt x="2193062" y="487187"/>
+                  </a:lnTo>
+                  <a:lnTo>
+                    <a:pt x="2277411" y="487187"/>
+                  </a:lnTo>
+                  <a:lnTo>
+                    <a:pt x="2277411" y="474131"/>
+                  </a:lnTo>
+                  <a:lnTo>
+                    <a:pt x="2361760" y="474131"/>
+                  </a:lnTo>
+                  <a:lnTo>
+                    <a:pt x="2361760" y="421955"/>
+                  </a:lnTo>
+                  <a:lnTo>
+                    <a:pt x="2446108" y="421955"/>
+                  </a:lnTo>
+                  <a:lnTo>
+                    <a:pt x="2446108" y="382429"/>
+                  </a:lnTo>
+                  <a:lnTo>
+                    <a:pt x="2530457" y="382429"/>
+                  </a:lnTo>
+                  <a:lnTo>
+                    <a:pt x="2530457" y="342752"/>
+                  </a:lnTo>
+                  <a:lnTo>
+                    <a:pt x="2614805" y="342752"/>
+                  </a:lnTo>
+                  <a:lnTo>
+                    <a:pt x="2614805" y="329281"/>
+                  </a:lnTo>
+                  <a:lnTo>
+                    <a:pt x="2699154" y="329281"/>
+                  </a:lnTo>
+                  <a:lnTo>
+                    <a:pt x="2699154" y="329281"/>
+                  </a:lnTo>
+                  <a:lnTo>
+                    <a:pt x="2783503" y="329281"/>
+                  </a:lnTo>
+                  <a:lnTo>
+                    <a:pt x="2783503" y="329281"/>
+                  </a:lnTo>
+                  <a:lnTo>
+                    <a:pt x="2867851" y="329281"/>
+                  </a:lnTo>
+                  <a:lnTo>
+                    <a:pt x="2867851" y="288869"/>
+                  </a:lnTo>
+                  <a:lnTo>
+                    <a:pt x="2952200" y="288869"/>
+                  </a:lnTo>
+                  <a:lnTo>
+                    <a:pt x="2952200" y="261648"/>
+                  </a:lnTo>
+                  <a:lnTo>
+                    <a:pt x="3036548" y="261648"/>
+                  </a:lnTo>
+                  <a:lnTo>
+                    <a:pt x="3036548" y="261648"/>
+                  </a:lnTo>
+                  <a:lnTo>
+                    <a:pt x="3120897" y="261648"/>
+                  </a:lnTo>
+                  <a:lnTo>
+                    <a:pt x="3120897" y="248012"/>
+                  </a:lnTo>
+                  <a:lnTo>
+                    <a:pt x="3205245" y="248012"/>
+                  </a:lnTo>
+                  <a:lnTo>
+                    <a:pt x="3205245" y="234384"/>
+                  </a:lnTo>
+                  <a:lnTo>
+                    <a:pt x="3289594" y="234384"/>
+                  </a:lnTo>
+                  <a:lnTo>
+                    <a:pt x="3289594" y="234384"/>
+                  </a:lnTo>
+                  <a:lnTo>
+                    <a:pt x="3373943" y="234384"/>
+                  </a:lnTo>
+                  <a:lnTo>
+                    <a:pt x="3373943" y="234384"/>
+                  </a:lnTo>
+                  <a:lnTo>
+                    <a:pt x="3458291" y="234384"/>
+                  </a:lnTo>
+                  <a:lnTo>
+                    <a:pt x="3458291" y="234384"/>
+                  </a:lnTo>
+                  <a:lnTo>
+                    <a:pt x="3542640" y="234384"/>
+                  </a:lnTo>
+                  <a:lnTo>
+                    <a:pt x="3542640" y="234384"/>
+                  </a:lnTo>
+                  <a:lnTo>
+                    <a:pt x="3626988" y="234384"/>
+                  </a:lnTo>
+                  <a:lnTo>
+                    <a:pt x="3626988" y="234384"/>
+                  </a:lnTo>
+                  <a:lnTo>
+                    <a:pt x="3711337" y="234384"/>
+                  </a:lnTo>
+                  <a:lnTo>
+                    <a:pt x="3711337" y="234384"/>
+                  </a:lnTo>
+                  <a:lnTo>
+                    <a:pt x="3795685" y="234384"/>
+                  </a:lnTo>
+                  <a:lnTo>
+                    <a:pt x="3795685" y="220745"/>
+                  </a:lnTo>
+                  <a:lnTo>
+                    <a:pt x="3880034" y="220745"/>
+                  </a:lnTo>
+                  <a:lnTo>
+                    <a:pt x="3880034" y="220745"/>
+                  </a:lnTo>
+                  <a:lnTo>
+                    <a:pt x="3964383" y="220745"/>
+                  </a:lnTo>
+                  <a:lnTo>
+                    <a:pt x="3964383" y="207101"/>
+                  </a:lnTo>
+                  <a:lnTo>
+                    <a:pt x="4048731" y="207101"/>
+                  </a:lnTo>
+                  <a:lnTo>
+                    <a:pt x="4048731" y="193458"/>
+                  </a:lnTo>
+                  <a:lnTo>
+                    <a:pt x="4133080" y="193458"/>
+                  </a:lnTo>
+                  <a:lnTo>
+                    <a:pt x="4133080" y="166250"/>
+                  </a:lnTo>
+                  <a:lnTo>
+                    <a:pt x="4217428" y="166250"/>
+                  </a:lnTo>
+                  <a:lnTo>
+                    <a:pt x="4217428" y="166250"/>
+                  </a:lnTo>
+                  <a:lnTo>
+                    <a:pt x="4301777" y="166250"/>
+                  </a:lnTo>
+                  <a:lnTo>
+                    <a:pt x="4301777" y="166250"/>
+                  </a:lnTo>
+                  <a:lnTo>
+                    <a:pt x="4386125" y="166250"/>
+                  </a:lnTo>
+                  <a:lnTo>
+                    <a:pt x="4386125" y="152642"/>
+                  </a:lnTo>
+                  <a:lnTo>
+                    <a:pt x="4470474" y="152642"/>
+                  </a:lnTo>
+                  <a:lnTo>
+                    <a:pt x="4470474" y="152642"/>
+                  </a:lnTo>
+                  <a:lnTo>
+                    <a:pt x="4554823" y="152642"/>
+                  </a:lnTo>
+                  <a:lnTo>
+                    <a:pt x="4554823" y="139025"/>
+                  </a:lnTo>
+                  <a:lnTo>
+                    <a:pt x="4639171" y="139025"/>
+                  </a:lnTo>
+                  <a:lnTo>
+                    <a:pt x="4639171" y="139025"/>
+                  </a:lnTo>
+                  <a:lnTo>
+                    <a:pt x="4723520" y="139025"/>
+                  </a:lnTo>
+                  <a:lnTo>
+                    <a:pt x="4723520" y="139025"/>
+                  </a:lnTo>
+                  <a:lnTo>
+                    <a:pt x="4807868" y="139025"/>
+                  </a:lnTo>
+                  <a:lnTo>
+                    <a:pt x="4807868" y="139025"/>
+                  </a:lnTo>
+                  <a:lnTo>
+                    <a:pt x="4892217" y="139025"/>
+                  </a:lnTo>
+                  <a:lnTo>
+                    <a:pt x="4892217" y="139025"/>
+                  </a:lnTo>
+                  <a:lnTo>
+                    <a:pt x="4976565" y="139025"/>
+                  </a:lnTo>
+                  <a:lnTo>
+                    <a:pt x="4976565" y="125435"/>
+                  </a:lnTo>
+                  <a:lnTo>
+                    <a:pt x="5060914" y="125435"/>
+                  </a:lnTo>
+                  <a:lnTo>
+                    <a:pt x="5060914" y="98352"/>
+                  </a:lnTo>
+                  <a:lnTo>
+                    <a:pt x="5145263" y="98352"/>
+                  </a:lnTo>
+                  <a:lnTo>
+                    <a:pt x="5145263" y="98352"/>
+                  </a:lnTo>
+                  <a:lnTo>
+                    <a:pt x="5229611" y="98352"/>
+                  </a:lnTo>
+                  <a:lnTo>
+                    <a:pt x="5229611" y="98352"/>
+                  </a:lnTo>
+                  <a:lnTo>
+                    <a:pt x="5313960" y="98352"/>
+                  </a:lnTo>
+                  <a:lnTo>
+                    <a:pt x="5313960" y="98352"/>
+                  </a:lnTo>
+                  <a:lnTo>
+                    <a:pt x="5398308" y="98352"/>
+                  </a:lnTo>
+                  <a:lnTo>
+                    <a:pt x="5398308" y="84637"/>
+                  </a:lnTo>
+                  <a:lnTo>
+                    <a:pt x="5482657" y="84637"/>
+                  </a:lnTo>
+                  <a:lnTo>
+                    <a:pt x="5482657" y="70915"/>
+                  </a:lnTo>
+                  <a:lnTo>
+                    <a:pt x="5567006" y="70915"/>
+                  </a:lnTo>
+                  <a:lnTo>
+                    <a:pt x="5567006" y="70915"/>
+                  </a:lnTo>
+                  <a:lnTo>
+                    <a:pt x="5651354" y="70915"/>
+                  </a:lnTo>
+                  <a:lnTo>
+                    <a:pt x="5651354" y="70915"/>
+                  </a:lnTo>
+                  <a:lnTo>
+                    <a:pt x="5735703" y="70915"/>
+                  </a:lnTo>
+                  <a:lnTo>
+                    <a:pt x="5735703" y="57169"/>
+                  </a:lnTo>
+                  <a:lnTo>
+                    <a:pt x="5820051" y="57169"/>
+                  </a:lnTo>
+                  <a:lnTo>
+                    <a:pt x="5820051" y="57169"/>
+                  </a:lnTo>
+                  <a:lnTo>
+                    <a:pt x="5904400" y="57169"/>
+                  </a:lnTo>
+                  <a:lnTo>
+                    <a:pt x="5904400" y="57169"/>
+                  </a:lnTo>
+                  <a:lnTo>
+                    <a:pt x="5988748" y="57169"/>
+                  </a:lnTo>
+                  <a:lnTo>
+                    <a:pt x="5988748" y="57169"/>
+                  </a:lnTo>
+                  <a:lnTo>
+                    <a:pt x="6073097" y="57169"/>
+                  </a:lnTo>
+                  <a:lnTo>
+                    <a:pt x="6073097" y="57169"/>
+                  </a:lnTo>
+                  <a:lnTo>
+                    <a:pt x="6157446" y="57169"/>
+                  </a:lnTo>
+                  <a:lnTo>
+                    <a:pt x="6157446" y="28730"/>
+                  </a:lnTo>
+                  <a:lnTo>
+                    <a:pt x="6241794" y="28730"/>
+                  </a:lnTo>
+                  <a:lnTo>
+                    <a:pt x="6241794" y="28730"/>
+                  </a:lnTo>
+                  <a:lnTo>
+                    <a:pt x="6326143" y="28730"/>
+                  </a:lnTo>
+                  <a:lnTo>
+                    <a:pt x="6326143" y="28730"/>
+                  </a:lnTo>
+                  <a:lnTo>
+                    <a:pt x="6410491" y="28730"/>
+                  </a:lnTo>
+                  <a:lnTo>
+                    <a:pt x="6410491" y="28730"/>
+                  </a:lnTo>
+                  <a:lnTo>
+                    <a:pt x="6494840" y="28730"/>
+                  </a:lnTo>
+                  <a:lnTo>
+                    <a:pt x="6494840" y="28730"/>
+                  </a:lnTo>
+                  <a:lnTo>
+                    <a:pt x="6579188" y="28730"/>
+                  </a:lnTo>
+                  <a:lnTo>
+                    <a:pt x="6579188" y="28730"/>
+                  </a:lnTo>
+                  <a:lnTo>
+                    <a:pt x="6663537" y="28730"/>
+                  </a:lnTo>
+                  <a:lnTo>
+                    <a:pt x="6663537" y="28730"/>
+                  </a:lnTo>
+                  <a:lnTo>
+                    <a:pt x="6747886" y="28730"/>
+                  </a:lnTo>
+                  <a:lnTo>
+                    <a:pt x="6747886" y="14352"/>
+                  </a:lnTo>
+                  <a:lnTo>
+                    <a:pt x="6832234" y="14352"/>
+                  </a:lnTo>
+                  <a:lnTo>
+                    <a:pt x="6832234" y="14352"/>
+                  </a:lnTo>
+                  <a:lnTo>
+                    <a:pt x="6916583" y="14352"/>
+                  </a:lnTo>
+                  <a:lnTo>
+                    <a:pt x="6916583" y="14352"/>
+                  </a:lnTo>
+                  <a:lnTo>
+                    <a:pt x="7000931" y="14352"/>
+                  </a:lnTo>
+                  <a:lnTo>
+                    <a:pt x="7000931" y="14352"/>
+                  </a:lnTo>
+                  <a:lnTo>
+                    <a:pt x="7085280" y="14352"/>
+                  </a:lnTo>
+                  <a:lnTo>
+                    <a:pt x="7085280" y="14352"/>
+                  </a:lnTo>
+                  <a:lnTo>
+                    <a:pt x="7169628" y="14352"/>
+                  </a:lnTo>
+                  <a:lnTo>
+                    <a:pt x="7169628" y="14352"/>
+                  </a:lnTo>
+                  <a:lnTo>
+                    <a:pt x="7253977" y="14352"/>
                   </a:lnTo>
                   <a:lnTo>
                     <a:pt x="7253977" y="0"/>
@@ -4527,8 +4527,8 @@
           </p:nvSpPr>
           <p:spPr>
             <a:xfrm>
-              <a:off x="4103887" y="5285568"/>
-              <a:ext cx="1422623" cy="109362"/>
+              <a:off x="3777811" y="5285568"/>
+              <a:ext cx="2074773" cy="109362"/>
             </a:xfrm>
             <a:prstGeom prst="rect">
               <a:avLst/>
@@ -4560,7 +4560,7 @@
                   <a:latin typeface="Helvetica"/>
                   <a:cs typeface="Helvetica"/>
                 </a:rPr>
-                <a:t>Days from admission</a:t>
+                <a:t>Days from terlipressin initiation</a:t>
               </a:r>
             </a:p>
           </p:txBody>
